--- a/HR-Attrition-Prediction.pptx
+++ b/HR-Attrition-Prediction.pptx
@@ -1793,11 +1793,7 @@
             </a:pPr>
             <a:r>
               <a:rPr lang="en-US"/>
-              <a:t>L'obiettivo</a:t>
-            </a:r>
-            <a:r>
-              <a:rPr lang="en-US"/>
-              <a:t> del mio progetto è prevedere se un dipendente lascerà l’azienda. Ho usato i dati da </a:t>
+              <a:t>L'obiettivo del mio progetto è prevedere se un dipendente lascerà l’azienda. Ho usato i dati da </a:t>
             </a:r>
             <a:r>
               <a:rPr lang="en-US" u="sng">
@@ -4669,7 +4665,7 @@
         <p:spPr>
           <a:xfrm>
             <a:off x="356025" y="3383375"/>
-            <a:ext cx="4522200" cy="1015800"/>
+            <a:ext cx="4522200" cy="1147500"/>
           </a:xfrm>
           <a:prstGeom prst="rect">
             <a:avLst/>
@@ -4805,7 +4801,7 @@
                 <a:cs typeface="Inter"/>
                 <a:sym typeface="Inter"/>
               </a:rPr>
-              <a:t>Progetto disponibile su </a:t>
+              <a:t>Progetto su </a:t>
             </a:r>
             <a:r>
               <a:rPr b="1" i="0" lang="en-US" sz="1510" u="sng" cap="none" strike="noStrike">
@@ -4820,6 +4816,90 @@
               </a:rPr>
               <a:t>GitHub </a:t>
             </a:r>
+            <a:br>
+              <a:rPr b="1" lang="en-US" sz="1510">
+                <a:solidFill>
+                  <a:srgbClr val="64748B"/>
+                </a:solidFill>
+                <a:latin typeface="Inter"/>
+                <a:ea typeface="Inter"/>
+                <a:cs typeface="Inter"/>
+                <a:sym typeface="Inter"/>
+              </a:rPr>
+            </a:br>
+            <a:r>
+              <a:rPr b="1" lang="en-US" sz="1510">
+                <a:solidFill>
+                  <a:srgbClr val="64748B"/>
+                </a:solidFill>
+                <a:latin typeface="Inter"/>
+                <a:ea typeface="Inter"/>
+                <a:cs typeface="Inter"/>
+                <a:sym typeface="Inter"/>
+              </a:rPr>
+              <a:t>Google Colab</a:t>
+            </a:r>
+            <a:r>
+              <a:rPr b="1" lang="en-US" sz="1510">
+                <a:solidFill>
+                  <a:srgbClr val="64748B"/>
+                </a:solidFill>
+                <a:latin typeface="Inter"/>
+                <a:ea typeface="Inter"/>
+                <a:cs typeface="Inter"/>
+                <a:sym typeface="Inter"/>
+              </a:rPr>
+              <a:t> </a:t>
+            </a:r>
+            <a:r>
+              <a:rPr b="1" lang="en-US" sz="1510" u="sng">
+                <a:solidFill>
+                  <a:schemeClr val="hlink"/>
+                </a:solidFill>
+                <a:latin typeface="Inter"/>
+                <a:ea typeface="Inter"/>
+                <a:cs typeface="Inter"/>
+                <a:sym typeface="Inter"/>
+                <a:hlinkClick r:id="rId5"/>
+              </a:rPr>
+              <a:t>Notebook</a:t>
+            </a:r>
+            <a:r>
+              <a:rPr b="1" lang="en-US" sz="1510">
+                <a:solidFill>
+                  <a:srgbClr val="64748B"/>
+                </a:solidFill>
+                <a:latin typeface="Inter"/>
+                <a:ea typeface="Inter"/>
+                <a:cs typeface="Inter"/>
+                <a:sym typeface="Inter"/>
+              </a:rPr>
+              <a:t> </a:t>
+            </a:r>
+            <a:br>
+              <a:rPr b="1" lang="en-US" sz="1510">
+                <a:solidFill>
+                  <a:srgbClr val="64748B"/>
+                </a:solidFill>
+                <a:latin typeface="Inter"/>
+                <a:ea typeface="Inter"/>
+                <a:cs typeface="Inter"/>
+                <a:sym typeface="Inter"/>
+              </a:rPr>
+            </a:br>
+            <a:r>
+              <a:rPr b="1" lang="en-US" sz="1510" u="sng">
+                <a:solidFill>
+                  <a:schemeClr val="hlink"/>
+                </a:solidFill>
+                <a:latin typeface="Inter"/>
+                <a:ea typeface="Inter"/>
+                <a:cs typeface="Inter"/>
+                <a:sym typeface="Inter"/>
+                <a:hlinkClick r:id="rId6"/>
+              </a:rPr>
+              <a:t>Dataset</a:t>
+            </a:r>
             <a:endParaRPr b="1" i="0" sz="1510" u="none" cap="none" strike="noStrike">
               <a:solidFill>
                 <a:srgbClr val="64748B"/>
@@ -5226,7 +5306,7 @@
           <p:nvPr/>
         </p:nvPicPr>
         <p:blipFill rotWithShape="1">
-          <a:blip r:embed="rId5">
+          <a:blip r:embed="rId7">
             <a:alphaModFix/>
           </a:blip>
           <a:srcRect b="0" l="0" r="0" t="0"/>
@@ -5253,7 +5333,7 @@
           <p:nvPr/>
         </p:nvPicPr>
         <p:blipFill rotWithShape="1">
-          <a:blip r:embed="rId6">
+          <a:blip r:embed="rId8">
             <a:alphaModFix/>
           </a:blip>
           <a:srcRect b="0" l="0" r="0" t="0"/>
@@ -5280,7 +5360,7 @@
           <p:nvPr/>
         </p:nvPicPr>
         <p:blipFill rotWithShape="1">
-          <a:blip r:embed="rId7">
+          <a:blip r:embed="rId9">
             <a:alphaModFix/>
           </a:blip>
           <a:srcRect b="0" l="0" r="0" t="0"/>
@@ -5969,7 +6049,7 @@
           <a:effectLst>
             <a:outerShdw blurRad="38100" rotWithShape="0" algn="bl" dir="5400000" dist="9525">
               <a:srgbClr val="1E3A5F">
-                <a:alpha val="3921"/>
+                <a:alpha val="3922"/>
               </a:srgbClr>
             </a:outerShdw>
           </a:effectLst>
@@ -6302,7 +6382,7 @@
           <a:effectLst>
             <a:outerShdw blurRad="38100" rotWithShape="0" algn="bl" dir="5400000" dist="9525">
               <a:srgbClr val="1E3A5F">
-                <a:alpha val="3921"/>
+                <a:alpha val="3922"/>
               </a:srgbClr>
             </a:outerShdw>
           </a:effectLst>
@@ -6635,7 +6715,7 @@
           <a:effectLst>
             <a:outerShdw blurRad="38100" rotWithShape="0" algn="bl" dir="5400000" dist="9525">
               <a:srgbClr val="1E3A5F">
-                <a:alpha val="3921"/>
+                <a:alpha val="3922"/>
               </a:srgbClr>
             </a:outerShdw>
           </a:effectLst>
@@ -7240,7 +7320,7 @@
           <a:effectLst>
             <a:outerShdw blurRad="38100" rotWithShape="0" algn="bl" dir="5400000" dist="9525">
               <a:srgbClr val="1E3A5F">
-                <a:alpha val="3921"/>
+                <a:alpha val="3922"/>
               </a:srgbClr>
             </a:outerShdw>
           </a:effectLst>
@@ -7446,7 +7526,7 @@
           <a:effectLst>
             <a:outerShdw blurRad="38100" rotWithShape="0" algn="bl" dir="5400000" dist="9525">
               <a:srgbClr val="1E3A5F">
-                <a:alpha val="3921"/>
+                <a:alpha val="3922"/>
               </a:srgbClr>
             </a:outerShdw>
           </a:effectLst>
@@ -7649,7 +7729,7 @@
           <a:effectLst>
             <a:outerShdw blurRad="76200" rotWithShape="0" algn="bl" dir="5400000" dist="19050">
               <a:srgbClr val="1E3A5F">
-                <a:alpha val="14901"/>
+                <a:alpha val="14902"/>
               </a:srgbClr>
             </a:outerShdw>
           </a:effectLst>
@@ -10373,7 +10453,7 @@
           <a:effectLst>
             <a:outerShdw blurRad="76200" rotWithShape="0" algn="bl" dir="5400000" dist="19050">
               <a:srgbClr val="1E3A5F">
-                <a:alpha val="14901"/>
+                <a:alpha val="14902"/>
               </a:srgbClr>
             </a:outerShdw>
           </a:effectLst>
@@ -11938,7 +12018,7 @@
           <a:effectLst>
             <a:outerShdw blurRad="38100" rotWithShape="0" algn="bl" dir="5400000" dist="9525">
               <a:srgbClr val="1E3A5F">
-                <a:alpha val="3921"/>
+                <a:alpha val="3922"/>
               </a:srgbClr>
             </a:outerShdw>
           </a:effectLst>
@@ -12144,7 +12224,7 @@
           <a:effectLst>
             <a:outerShdw blurRad="38100" rotWithShape="0" algn="bl" dir="5400000" dist="9525">
               <a:srgbClr val="1E3A5F">
-                <a:alpha val="3921"/>
+                <a:alpha val="3922"/>
               </a:srgbClr>
             </a:outerShdw>
           </a:effectLst>
@@ -12350,7 +12430,7 @@
           <a:effectLst>
             <a:outerShdw blurRad="38100" rotWithShape="0" algn="bl" dir="5400000" dist="9525">
               <a:srgbClr val="1E3A5F">
-                <a:alpha val="3921"/>
+                <a:alpha val="3922"/>
               </a:srgbClr>
             </a:outerShdw>
           </a:effectLst>
@@ -16591,7 +16671,7 @@
           <a:effectLst>
             <a:outerShdw blurRad="76200" rotWithShape="0" algn="bl" dir="5400000" dist="19050">
               <a:srgbClr val="1E3A5F">
-                <a:alpha val="14901"/>
+                <a:alpha val="14902"/>
               </a:srgbClr>
             </a:outerShdw>
           </a:effectLst>
@@ -16615,7 +16695,7 @@
           </a:prstGeom>
           <a:solidFill>
             <a:srgbClr val="FFFFFF">
-              <a:alpha val="14901"/>
+              <a:alpha val="14902"/>
             </a:srgbClr>
           </a:solidFill>
           <a:ln>
@@ -18664,7 +18744,7 @@
           <a:ln cap="flat" cmpd="sng" w="9525">
             <a:solidFill>
               <a:srgbClr val="0D9488">
-                <a:alpha val="14901"/>
+                <a:alpha val="14902"/>
               </a:srgbClr>
             </a:solidFill>
             <a:prstDash val="solid"/>
@@ -19205,7 +19285,7 @@
           <a:ln cap="flat" cmpd="sng" w="9525">
             <a:solidFill>
               <a:srgbClr val="1E3A5F">
-                <a:alpha val="12156"/>
+                <a:alpha val="12157"/>
               </a:srgbClr>
             </a:solidFill>
             <a:prstDash val="solid"/>
@@ -19794,7 +19874,7 @@
           <a:ln cap="flat" cmpd="sng" w="9525">
             <a:solidFill>
               <a:srgbClr val="1E3A5F">
-                <a:alpha val="12156"/>
+                <a:alpha val="12157"/>
               </a:srgbClr>
             </a:solidFill>
             <a:prstDash val="solid"/>
@@ -21491,7 +21571,7 @@
           </a:prstGeom>
           <a:solidFill>
             <a:srgbClr val="0D9488">
-              <a:alpha val="3921"/>
+              <a:alpha val="3922"/>
             </a:srgbClr>
           </a:solidFill>
           <a:ln>
@@ -22990,13 +23070,12 @@
           <p:cNvPicPr preferRelativeResize="0"/>
           <p:nvPr/>
         </p:nvPicPr>
-        <p:blipFill>
+        <p:blipFill rotWithShape="1">
           <a:blip r:embed="rId6">
             <a:alphaModFix/>
           </a:blip>
-          <a:stretch>
-            <a:fillRect/>
-          </a:stretch>
+          <a:srcRect b="0" l="0" r="0" t="0"/>
+          <a:stretch/>
         </p:blipFill>
         <p:spPr>
           <a:xfrm>
@@ -23020,13 +23099,12 @@
           <p:cNvPicPr preferRelativeResize="0"/>
           <p:nvPr/>
         </p:nvPicPr>
-        <p:blipFill>
+        <p:blipFill rotWithShape="1">
           <a:blip r:embed="rId7">
             <a:alphaModFix/>
           </a:blip>
-          <a:stretch>
-            <a:fillRect/>
-          </a:stretch>
+          <a:srcRect b="0" l="0" r="0" t="0"/>
+          <a:stretch/>
         </p:blipFill>
         <p:spPr>
           <a:xfrm>
@@ -24646,7 +24724,7 @@
           <a:effectLst>
             <a:outerShdw blurRad="38100" rotWithShape="0" algn="bl" dir="5400000" dist="9525">
               <a:srgbClr val="1E3A5F">
-                <a:alpha val="3921"/>
+                <a:alpha val="3922"/>
               </a:srgbClr>
             </a:outerShdw>
           </a:effectLst>
@@ -25019,7 +25097,7 @@
           <a:effectLst>
             <a:outerShdw blurRad="38100" rotWithShape="0" algn="bl" dir="5400000" dist="9525">
               <a:srgbClr val="1E3A5F">
-                <a:alpha val="3921"/>
+                <a:alpha val="3922"/>
               </a:srgbClr>
             </a:outerShdw>
           </a:effectLst>
@@ -25392,7 +25470,7 @@
           <a:effectLst>
             <a:outerShdw blurRad="38100" rotWithShape="0" algn="bl" dir="5400000" dist="9525">
               <a:srgbClr val="1E3A5F">
-                <a:alpha val="3921"/>
+                <a:alpha val="3922"/>
               </a:srgbClr>
             </a:outerShdw>
           </a:effectLst>
@@ -25722,7 +25800,7 @@
           <a:effectLst>
             <a:outerShdw blurRad="76200" rotWithShape="0" algn="bl" dir="5400000" dist="19050">
               <a:srgbClr val="1E3A5F">
-                <a:alpha val="14901"/>
+                <a:alpha val="14902"/>
               </a:srgbClr>
             </a:outerShdw>
           </a:effectLst>

--- a/HR-Attrition-Prediction.pptx
+++ b/HR-Attrition-Prediction.pptx
@@ -4817,7 +4817,7 @@
               <a:t>GitHub </a:t>
             </a:r>
             <a:br>
-              <a:rPr b="1" lang="en-US" sz="1510">
+              <a:rPr b="1" i="0" lang="en-US" sz="1510" u="none" cap="none" strike="noStrike">
                 <a:solidFill>
                   <a:srgbClr val="64748B"/>
                 </a:solidFill>
@@ -4828,7 +4828,7 @@
               </a:rPr>
             </a:br>
             <a:r>
-              <a:rPr b="1" lang="en-US" sz="1510">
+              <a:rPr b="1" i="0" lang="en-US" sz="1510" u="none" cap="none" strike="noStrike">
                 <a:solidFill>
                   <a:srgbClr val="64748B"/>
                 </a:solidFill>
@@ -4837,22 +4837,10 @@
                 <a:cs typeface="Inter"/>
                 <a:sym typeface="Inter"/>
               </a:rPr>
-              <a:t>Google Colab</a:t>
-            </a:r>
-            <a:r>
-              <a:rPr b="1" lang="en-US" sz="1510">
-                <a:solidFill>
-                  <a:srgbClr val="64748B"/>
-                </a:solidFill>
-                <a:latin typeface="Inter"/>
-                <a:ea typeface="Inter"/>
-                <a:cs typeface="Inter"/>
-                <a:sym typeface="Inter"/>
-              </a:rPr>
-              <a:t> </a:t>
-            </a:r>
-            <a:r>
-              <a:rPr b="1" lang="en-US" sz="1510" u="sng">
+              <a:t>Google Colab </a:t>
+            </a:r>
+            <a:r>
+              <a:rPr b="1" i="0" lang="en-US" sz="1510" u="sng" cap="none" strike="noStrike">
                 <a:solidFill>
                   <a:schemeClr val="hlink"/>
                 </a:solidFill>
@@ -4865,7 +4853,7 @@
               <a:t>Notebook</a:t>
             </a:r>
             <a:r>
-              <a:rPr b="1" lang="en-US" sz="1510">
+              <a:rPr b="1" i="0" lang="en-US" sz="1510" u="none" cap="none" strike="noStrike">
                 <a:solidFill>
                   <a:srgbClr val="64748B"/>
                 </a:solidFill>
@@ -4877,7 +4865,7 @@
               <a:t> </a:t>
             </a:r>
             <a:br>
-              <a:rPr b="1" lang="en-US" sz="1510">
+              <a:rPr b="1" i="0" lang="en-US" sz="1510" u="none" cap="none" strike="noStrike">
                 <a:solidFill>
                   <a:srgbClr val="64748B"/>
                 </a:solidFill>
@@ -4888,7 +4876,7 @@
               </a:rPr>
             </a:br>
             <a:r>
-              <a:rPr b="1" lang="en-US" sz="1510" u="sng">
+              <a:rPr b="1" i="0" lang="en-US" sz="1510" u="sng" cap="none" strike="noStrike">
                 <a:solidFill>
                   <a:schemeClr val="hlink"/>
                 </a:solidFill>
@@ -18310,7 +18298,19 @@
                 <a:cs typeface="Inter"/>
                 <a:sym typeface="Inter"/>
               </a:rPr>
-              <a:t>F1: 0.459</a:t>
+              <a:t>F1: 0.45</a:t>
+            </a:r>
+            <a:r>
+              <a:rPr lang="en-US" sz="680">
+                <a:solidFill>
+                  <a:srgbClr val="64748B"/>
+                </a:solidFill>
+                <a:latin typeface="Inter"/>
+                <a:ea typeface="Inter"/>
+                <a:cs typeface="Inter"/>
+                <a:sym typeface="Inter"/>
+              </a:rPr>
+              <a:t>2</a:t>
             </a:r>
             <a:endParaRPr b="0" i="0" sz="680" u="none" cap="none" strike="noStrike">
               <a:solidFill>
@@ -18503,7 +18503,19 @@
                 <a:cs typeface="Inter"/>
                 <a:sym typeface="Inter"/>
               </a:rPr>
-              <a:t>F1: 0.480</a:t>
+              <a:t>F1: 0.4</a:t>
+            </a:r>
+            <a:r>
+              <a:rPr lang="en-US" sz="680">
+                <a:solidFill>
+                  <a:srgbClr val="64748B"/>
+                </a:solidFill>
+                <a:latin typeface="Inter"/>
+                <a:ea typeface="Inter"/>
+                <a:cs typeface="Inter"/>
+                <a:sym typeface="Inter"/>
+              </a:rPr>
+              <a:t>94</a:t>
             </a:r>
             <a:endParaRPr b="0" i="0" sz="680" u="none" cap="none" strike="noStrike">
               <a:solidFill>
@@ -18706,7 +18718,19 @@
                 <a:cs typeface="Inter"/>
                 <a:sym typeface="Inter"/>
               </a:rPr>
-              <a:t>F1: 0.527</a:t>
+              <a:t>F1: 0.5</a:t>
+            </a:r>
+            <a:r>
+              <a:rPr b="1" lang="en-US" sz="680">
+                <a:solidFill>
+                  <a:srgbClr val="0D9488"/>
+                </a:solidFill>
+                <a:latin typeface="Inter"/>
+                <a:ea typeface="Inter"/>
+                <a:cs typeface="Inter"/>
+                <a:sym typeface="Inter"/>
+              </a:rPr>
+              <a:t>49</a:t>
             </a:r>
             <a:endParaRPr b="0" i="0" sz="680" u="none" cap="none" strike="noStrike">
               <a:solidFill>
@@ -19450,7 +19474,19 @@
                 <a:cs typeface="Inter"/>
                 <a:sym typeface="Inter"/>
               </a:rPr>
-              <a:t>F1: 0.531</a:t>
+              <a:t>F1: 0.5</a:t>
+            </a:r>
+            <a:r>
+              <a:rPr b="1" lang="en-US" sz="680">
+                <a:solidFill>
+                  <a:srgbClr val="1E3A5F"/>
+                </a:solidFill>
+                <a:latin typeface="Inter"/>
+                <a:ea typeface="Inter"/>
+                <a:cs typeface="Inter"/>
+                <a:sym typeface="Inter"/>
+              </a:rPr>
+              <a:t>29</a:t>
             </a:r>
             <a:endParaRPr b="0" i="0" sz="680" u="none" cap="none" strike="noStrike">
               <a:solidFill>

--- a/HR-Attrition-Prediction.pptx
+++ b/HR-Attrition-Prediction.pptx
@@ -1971,7 +1971,8 @@
               <a:buNone/>
             </a:pPr>
             <a:r>
-              <a:t/>
+              <a:rPr lang="en-US"/>
+              <a:t>Il dataset ha 1.470 osservazioni e 35 colonne, senza valori mancanti, con informazioni anagrafiche, professionali e di soddisfazione. La variabile target è sbilanciata: 84% No e solo 16% Ye </a:t>
             </a:r>
             <a:endParaRPr/>
           </a:p>
@@ -2136,7 +2137,8 @@
               <a:buNone/>
             </a:pPr>
             <a:r>
-              <a:t/>
+              <a:rPr lang="en-US"/>
+              <a:t>Ho ridotto le feature da 35 a 28, eliminando colonne costanti, identificativi come EmployeeNumber e variabili ridondanti con MonthlyIncome, per evitare rumore e data leakage </a:t>
             </a:r>
             <a:endParaRPr/>
           </a:p>
@@ -2301,7 +2303,8 @@
               <a:buNone/>
             </a:pPr>
             <a:r>
-              <a:t/>
+              <a:rPr lang="en-US"/>
+              <a:t>Dall'EDA emergono tre pattern: chi lascia è più giovane e con reddito più basso, l'OverTime è un segnale forte, ma nessuna correlazione singola supera 0.20 — serve combinare più fattori </a:t>
             </a:r>
             <a:endParaRPr/>
           </a:p>
@@ -2466,7 +2469,8 @@
               <a:buNone/>
             </a:pPr>
             <a:r>
-              <a:t/>
+              <a:rPr lang="en-US"/>
+              <a:t>Ho applicato uno split stratificato 80/20, One-Hot Encoding che porta le feature da 28 a 41, standardizzazione per la Regressione Logistica, e class_weight bilanciato per compensare lo sbilanciamento. </a:t>
             </a:r>
             <a:endParaRPr/>
           </a:p>
@@ -2631,7 +2635,8 @@
               <a:buNone/>
             </a:pPr>
             <a:r>
-              <a:t/>
+              <a:rPr lang="en-US"/>
+              <a:t>Ho confrontato Regressione Logistica e Random Forest, ottimizzando la soglia di decisione con cross-validation 5-fold: soglia 0.6 per la prima, 0.2 per la seconda, in base al miglior F1-score </a:t>
             </a:r>
             <a:endParaRPr/>
           </a:p>
@@ -2796,7 +2801,8 @@
               <a:buNone/>
             </a:pPr>
             <a:r>
-              <a:t/>
+              <a:rPr lang="en-US"/>
+              <a:t>Sul test set la Regressione Logistica vince con il miglior equilibrio: 82.7% di accuracy e ROC-AUC di 81.7%, contro 78.2% e  del Random Forest. </a:t>
             </a:r>
             <a:endParaRPr/>
           </a:p>
@@ -2961,7 +2967,8 @@
               <a:buNone/>
             </a:pPr>
             <a:r>
-              <a:t/>
+              <a:rPr lang="en-US"/>
+              <a:t>Come sviluppi futuri propongo tuning degli iperparametri, modelli più avanzati come XGBoost e nuovo feature engineering; il limite principale resta il recall sulla classe minoritaria, utile per un sistema di early warning HR </a:t>
             </a:r>
             <a:endParaRPr/>
           </a:p>
@@ -3126,7 +3133,8 @@
               <a:buNone/>
             </a:pPr>
             <a:r>
-              <a:t/>
+              <a:rPr lang="en-US"/>
+              <a:t>Per questo progetto ho usato Google Gemini per le immagini, Claude Sonnet per il codice del notebook e Replit per costruire la presentazione. Ho specificato tutti i prompt nel file su GitHub.</a:t>
             </a:r>
             <a:endParaRPr/>
           </a:p>
@@ -4816,6 +4824,18 @@
               </a:rPr>
               <a:t>GitHub </a:t>
             </a:r>
+            <a:r>
+              <a:rPr b="1" lang="en-US" sz="1510">
+                <a:solidFill>
+                  <a:srgbClr val="64748B"/>
+                </a:solidFill>
+                <a:latin typeface="Inter"/>
+                <a:ea typeface="Inter"/>
+                <a:cs typeface="Inter"/>
+                <a:sym typeface="Inter"/>
+              </a:rPr>
+              <a:t>(+attività AWS)</a:t>
+            </a:r>
             <a:br>
               <a:rPr b="1" i="0" lang="en-US" sz="1510" u="none" cap="none" strike="noStrike">
                 <a:solidFill>
@@ -21836,64 +21856,10 @@
                 <a:cs typeface="Inter"/>
                 <a:sym typeface="Inter"/>
               </a:rPr>
-              <a:t>81.3%</a:t>
-            </a:r>
-            <a:endParaRPr b="0" i="0" sz="1300" u="none" cap="none" strike="noStrike">
-              <a:solidFill>
-                <a:schemeClr val="dk1"/>
-              </a:solidFill>
-              <a:latin typeface="Calibri"/>
-              <a:ea typeface="Calibri"/>
-              <a:cs typeface="Calibri"/>
-              <a:sym typeface="Calibri"/>
-            </a:endParaRPr>
-          </a:p>
-        </p:txBody>
-      </p:sp>
-      <p:sp>
-        <p:nvSpPr>
-          <p:cNvPr id="321" name="Google Shape;321;p9"/>
-          <p:cNvSpPr/>
-          <p:nvPr/>
-        </p:nvSpPr>
-        <p:spPr>
-          <a:xfrm>
-            <a:off x="4148338" y="1856556"/>
-            <a:ext cx="755794" cy="195263"/>
-          </a:xfrm>
-          <a:prstGeom prst="rect">
-            <a:avLst/>
-          </a:prstGeom>
-          <a:noFill/>
-          <a:ln>
-            <a:noFill/>
-          </a:ln>
-        </p:spPr>
-        <p:txBody>
-          <a:bodyPr anchorCtr="0" anchor="ctr" bIns="0" lIns="0" spcFirstLastPara="1" rIns="0" wrap="square" tIns="0">
-            <a:noAutofit/>
-          </a:bodyPr>
-          <a:lstStyle/>
-          <a:p>
-            <a:pPr indent="0" lvl="0" marL="0" marR="0" rtl="0" algn="ctr">
-              <a:lnSpc>
-                <a:spcPct val="100000"/>
-              </a:lnSpc>
-              <a:spcBef>
-                <a:spcPts val="0"/>
-              </a:spcBef>
-              <a:spcAft>
-                <a:spcPts val="0"/>
-              </a:spcAft>
-              <a:buClr>
-                <a:srgbClr val="1E3A5F"/>
-              </a:buClr>
-              <a:buSzPts val="1300"/>
-              <a:buFont typeface="Inter"/>
-              <a:buNone/>
-            </a:pPr>
-            <a:r>
-              <a:rPr b="1" i="0" lang="en-US" sz="1300" u="none" cap="none" strike="noStrike">
+              <a:t>8</a:t>
+            </a:r>
+            <a:r>
+              <a:rPr b="1" lang="en-US" sz="1300">
                 <a:solidFill>
                   <a:srgbClr val="1E3A5F"/>
                 </a:solidFill>
@@ -21902,62 +21868,8 @@
                 <a:cs typeface="Inter"/>
                 <a:sym typeface="Inter"/>
               </a:rPr>
-              <a:t>43.5%</a:t>
-            </a:r>
-            <a:endParaRPr b="0" i="0" sz="1300" u="none" cap="none" strike="noStrike">
-              <a:solidFill>
-                <a:schemeClr val="dk1"/>
-              </a:solidFill>
-              <a:latin typeface="Calibri"/>
-              <a:ea typeface="Calibri"/>
-              <a:cs typeface="Calibri"/>
-              <a:sym typeface="Calibri"/>
-            </a:endParaRPr>
-          </a:p>
-        </p:txBody>
-      </p:sp>
-      <p:sp>
-        <p:nvSpPr>
-          <p:cNvPr id="322" name="Google Shape;322;p9"/>
-          <p:cNvSpPr/>
-          <p:nvPr/>
-        </p:nvSpPr>
-        <p:spPr>
-          <a:xfrm>
-            <a:off x="5339983" y="1856556"/>
-            <a:ext cx="721162" cy="195263"/>
-          </a:xfrm>
-          <a:prstGeom prst="rect">
-            <a:avLst/>
-          </a:prstGeom>
-          <a:noFill/>
-          <a:ln>
-            <a:noFill/>
-          </a:ln>
-        </p:spPr>
-        <p:txBody>
-          <a:bodyPr anchorCtr="0" anchor="ctr" bIns="0" lIns="0" spcFirstLastPara="1" rIns="0" wrap="square" tIns="0">
-            <a:noAutofit/>
-          </a:bodyPr>
-          <a:lstStyle/>
-          <a:p>
-            <a:pPr indent="0" lvl="0" marL="0" marR="0" rtl="0" algn="ctr">
-              <a:lnSpc>
-                <a:spcPct val="100000"/>
-              </a:lnSpc>
-              <a:spcBef>
-                <a:spcPts val="0"/>
-              </a:spcBef>
-              <a:spcAft>
-                <a:spcPts val="0"/>
-              </a:spcAft>
-              <a:buClr>
-                <a:srgbClr val="1E3A5F"/>
-              </a:buClr>
-              <a:buSzPts val="1300"/>
-              <a:buFont typeface="Inter"/>
-              <a:buNone/>
-            </a:pPr>
+              <a:t>2</a:t>
+            </a:r>
             <a:r>
               <a:rPr b="1" i="0" lang="en-US" sz="1300" u="none" cap="none" strike="noStrike">
                 <a:solidFill>
@@ -21968,128 +21880,20 @@
                 <a:cs typeface="Inter"/>
                 <a:sym typeface="Inter"/>
               </a:rPr>
-              <a:t>57.4%</a:t>
-            </a:r>
-            <a:endParaRPr b="0" i="0" sz="1300" u="none" cap="none" strike="noStrike">
-              <a:solidFill>
-                <a:schemeClr val="dk1"/>
-              </a:solidFill>
-              <a:latin typeface="Calibri"/>
-              <a:ea typeface="Calibri"/>
-              <a:cs typeface="Calibri"/>
-              <a:sym typeface="Calibri"/>
-            </a:endParaRPr>
-          </a:p>
-        </p:txBody>
-      </p:sp>
-      <p:sp>
-        <p:nvSpPr>
-          <p:cNvPr id="323" name="Google Shape;323;p9"/>
-          <p:cNvSpPr/>
-          <p:nvPr/>
-        </p:nvSpPr>
-        <p:spPr>
-          <a:xfrm>
-            <a:off x="6489944" y="1856556"/>
-            <a:ext cx="769821" cy="195263"/>
-          </a:xfrm>
-          <a:prstGeom prst="rect">
-            <a:avLst/>
-          </a:prstGeom>
-          <a:noFill/>
-          <a:ln>
-            <a:noFill/>
-          </a:ln>
-        </p:spPr>
-        <p:txBody>
-          <a:bodyPr anchorCtr="0" anchor="ctr" bIns="0" lIns="0" spcFirstLastPara="1" rIns="0" wrap="square" tIns="0">
-            <a:noAutofit/>
-          </a:bodyPr>
-          <a:lstStyle/>
-          <a:p>
-            <a:pPr indent="0" lvl="0" marL="0" marR="0" rtl="0" algn="ctr">
-              <a:lnSpc>
-                <a:spcPct val="100000"/>
-              </a:lnSpc>
-              <a:spcBef>
-                <a:spcPts val="0"/>
-              </a:spcBef>
-              <a:spcAft>
-                <a:spcPts val="0"/>
-              </a:spcAft>
-              <a:buClr>
-                <a:srgbClr val="0D9488"/>
-              </a:buClr>
-              <a:buSzPts val="1300"/>
-              <a:buFont typeface="Inter"/>
-              <a:buNone/>
-            </a:pPr>
-            <a:r>
-              <a:rPr b="1" i="0" lang="en-US" sz="1300" u="none" cap="none" strike="noStrike">
-                <a:solidFill>
-                  <a:srgbClr val="0D9488"/>
+              <a:t>.</a:t>
+            </a:r>
+            <a:r>
+              <a:rPr b="1" lang="en-US" sz="1300">
+                <a:solidFill>
+                  <a:srgbClr val="1E3A5F"/>
                 </a:solidFill>
                 <a:latin typeface="Inter"/>
                 <a:ea typeface="Inter"/>
                 <a:cs typeface="Inter"/>
                 <a:sym typeface="Inter"/>
               </a:rPr>
-              <a:t>49.5%</a:t>
-            </a:r>
-            <a:endParaRPr b="0" i="0" sz="1300" u="none" cap="none" strike="noStrike">
-              <a:solidFill>
-                <a:schemeClr val="dk1"/>
-              </a:solidFill>
-              <a:latin typeface="Calibri"/>
-              <a:ea typeface="Calibri"/>
-              <a:cs typeface="Calibri"/>
-              <a:sym typeface="Calibri"/>
-            </a:endParaRPr>
-          </a:p>
-        </p:txBody>
-      </p:sp>
-      <p:sp>
-        <p:nvSpPr>
-          <p:cNvPr id="324" name="Google Shape;324;p9"/>
-          <p:cNvSpPr/>
-          <p:nvPr/>
-        </p:nvSpPr>
-        <p:spPr>
-          <a:xfrm>
-            <a:off x="7757056" y="1856556"/>
-            <a:ext cx="584180" cy="195263"/>
-          </a:xfrm>
-          <a:prstGeom prst="rect">
-            <a:avLst/>
-          </a:prstGeom>
-          <a:noFill/>
-          <a:ln>
-            <a:noFill/>
-          </a:ln>
-        </p:spPr>
-        <p:txBody>
-          <a:bodyPr anchorCtr="0" anchor="ctr" bIns="0" lIns="0" spcFirstLastPara="1" rIns="0" wrap="square" tIns="0">
-            <a:noAutofit/>
-          </a:bodyPr>
-          <a:lstStyle/>
-          <a:p>
-            <a:pPr indent="0" lvl="0" marL="0" marR="0" rtl="0" algn="ctr">
-              <a:lnSpc>
-                <a:spcPct val="100000"/>
-              </a:lnSpc>
-              <a:spcBef>
-                <a:spcPts val="0"/>
-              </a:spcBef>
-              <a:spcAft>
-                <a:spcPts val="0"/>
-              </a:spcAft>
-              <a:buClr>
-                <a:srgbClr val="1E3A5F"/>
-              </a:buClr>
-              <a:buSzPts val="1300"/>
-              <a:buFont typeface="Inter"/>
-              <a:buNone/>
-            </a:pPr>
+              <a:t>7</a:t>
+            </a:r>
             <a:r>
               <a:rPr b="1" i="0" lang="en-US" sz="1300" u="none" cap="none" strike="noStrike">
                 <a:solidFill>
@@ -22100,7 +21904,415 @@
                 <a:cs typeface="Inter"/>
                 <a:sym typeface="Inter"/>
               </a:rPr>
-              <a:t>0.811</a:t>
+              <a:t>%</a:t>
+            </a:r>
+            <a:endParaRPr b="0" i="0" sz="1300" u="none" cap="none" strike="noStrike">
+              <a:solidFill>
+                <a:schemeClr val="dk1"/>
+              </a:solidFill>
+              <a:latin typeface="Calibri"/>
+              <a:ea typeface="Calibri"/>
+              <a:cs typeface="Calibri"/>
+              <a:sym typeface="Calibri"/>
+            </a:endParaRPr>
+          </a:p>
+        </p:txBody>
+      </p:sp>
+      <p:sp>
+        <p:nvSpPr>
+          <p:cNvPr id="321" name="Google Shape;321;p9"/>
+          <p:cNvSpPr/>
+          <p:nvPr/>
+        </p:nvSpPr>
+        <p:spPr>
+          <a:xfrm>
+            <a:off x="4148338" y="1856556"/>
+            <a:ext cx="755794" cy="195263"/>
+          </a:xfrm>
+          <a:prstGeom prst="rect">
+            <a:avLst/>
+          </a:prstGeom>
+          <a:noFill/>
+          <a:ln>
+            <a:noFill/>
+          </a:ln>
+        </p:spPr>
+        <p:txBody>
+          <a:bodyPr anchorCtr="0" anchor="ctr" bIns="0" lIns="0" spcFirstLastPara="1" rIns="0" wrap="square" tIns="0">
+            <a:noAutofit/>
+          </a:bodyPr>
+          <a:lstStyle/>
+          <a:p>
+            <a:pPr indent="0" lvl="0" marL="0" marR="0" rtl="0" algn="ctr">
+              <a:lnSpc>
+                <a:spcPct val="100000"/>
+              </a:lnSpc>
+              <a:spcBef>
+                <a:spcPts val="0"/>
+              </a:spcBef>
+              <a:spcAft>
+                <a:spcPts val="0"/>
+              </a:spcAft>
+              <a:buClr>
+                <a:srgbClr val="1E3A5F"/>
+              </a:buClr>
+              <a:buSzPts val="1300"/>
+              <a:buFont typeface="Inter"/>
+              <a:buNone/>
+            </a:pPr>
+            <a:r>
+              <a:rPr b="1" i="0" lang="en-US" sz="1300" u="none" cap="none" strike="noStrike">
+                <a:solidFill>
+                  <a:srgbClr val="1E3A5F"/>
+                </a:solidFill>
+                <a:latin typeface="Inter"/>
+                <a:ea typeface="Inter"/>
+                <a:cs typeface="Inter"/>
+                <a:sym typeface="Inter"/>
+              </a:rPr>
+              <a:t>4</a:t>
+            </a:r>
+            <a:r>
+              <a:rPr b="1" lang="en-US" sz="1300">
+                <a:solidFill>
+                  <a:srgbClr val="1E3A5F"/>
+                </a:solidFill>
+                <a:latin typeface="Inter"/>
+                <a:ea typeface="Inter"/>
+                <a:cs typeface="Inter"/>
+                <a:sym typeface="Inter"/>
+              </a:rPr>
+              <a:t>6</a:t>
+            </a:r>
+            <a:r>
+              <a:rPr b="1" i="0" lang="en-US" sz="1300" u="none" cap="none" strike="noStrike">
+                <a:solidFill>
+                  <a:srgbClr val="1E3A5F"/>
+                </a:solidFill>
+                <a:latin typeface="Inter"/>
+                <a:ea typeface="Inter"/>
+                <a:cs typeface="Inter"/>
+                <a:sym typeface="Inter"/>
+              </a:rPr>
+              <a:t>.</a:t>
+            </a:r>
+            <a:r>
+              <a:rPr b="1" lang="en-US" sz="1300">
+                <a:solidFill>
+                  <a:srgbClr val="1E3A5F"/>
+                </a:solidFill>
+                <a:latin typeface="Inter"/>
+                <a:ea typeface="Inter"/>
+                <a:cs typeface="Inter"/>
+                <a:sym typeface="Inter"/>
+              </a:rPr>
+              <a:t>7</a:t>
+            </a:r>
+            <a:r>
+              <a:rPr b="1" i="0" lang="en-US" sz="1300" u="none" cap="none" strike="noStrike">
+                <a:solidFill>
+                  <a:srgbClr val="1E3A5F"/>
+                </a:solidFill>
+                <a:latin typeface="Inter"/>
+                <a:ea typeface="Inter"/>
+                <a:cs typeface="Inter"/>
+                <a:sym typeface="Inter"/>
+              </a:rPr>
+              <a:t>%</a:t>
+            </a:r>
+            <a:endParaRPr b="0" i="0" sz="1300" u="none" cap="none" strike="noStrike">
+              <a:solidFill>
+                <a:schemeClr val="dk1"/>
+              </a:solidFill>
+              <a:latin typeface="Calibri"/>
+              <a:ea typeface="Calibri"/>
+              <a:cs typeface="Calibri"/>
+              <a:sym typeface="Calibri"/>
+            </a:endParaRPr>
+          </a:p>
+        </p:txBody>
+      </p:sp>
+      <p:sp>
+        <p:nvSpPr>
+          <p:cNvPr id="322" name="Google Shape;322;p9"/>
+          <p:cNvSpPr/>
+          <p:nvPr/>
+        </p:nvSpPr>
+        <p:spPr>
+          <a:xfrm>
+            <a:off x="5339983" y="1856556"/>
+            <a:ext cx="721162" cy="195263"/>
+          </a:xfrm>
+          <a:prstGeom prst="rect">
+            <a:avLst/>
+          </a:prstGeom>
+          <a:noFill/>
+          <a:ln>
+            <a:noFill/>
+          </a:ln>
+        </p:spPr>
+        <p:txBody>
+          <a:bodyPr anchorCtr="0" anchor="ctr" bIns="0" lIns="0" spcFirstLastPara="1" rIns="0" wrap="square" tIns="0">
+            <a:noAutofit/>
+          </a:bodyPr>
+          <a:lstStyle/>
+          <a:p>
+            <a:pPr indent="0" lvl="0" marL="0" marR="0" rtl="0" algn="ctr">
+              <a:lnSpc>
+                <a:spcPct val="100000"/>
+              </a:lnSpc>
+              <a:spcBef>
+                <a:spcPts val="0"/>
+              </a:spcBef>
+              <a:spcAft>
+                <a:spcPts val="0"/>
+              </a:spcAft>
+              <a:buClr>
+                <a:srgbClr val="1E3A5F"/>
+              </a:buClr>
+              <a:buSzPts val="1300"/>
+              <a:buFont typeface="Inter"/>
+              <a:buNone/>
+            </a:pPr>
+            <a:r>
+              <a:rPr b="1" i="0" lang="en-US" sz="1300" u="none" cap="none" strike="noStrike">
+                <a:solidFill>
+                  <a:srgbClr val="1E3A5F"/>
+                </a:solidFill>
+                <a:latin typeface="Inter"/>
+                <a:ea typeface="Inter"/>
+                <a:cs typeface="Inter"/>
+                <a:sym typeface="Inter"/>
+              </a:rPr>
+              <a:t>5</a:t>
+            </a:r>
+            <a:r>
+              <a:rPr b="1" lang="en-US" sz="1300">
+                <a:solidFill>
+                  <a:srgbClr val="1E3A5F"/>
+                </a:solidFill>
+                <a:latin typeface="Inter"/>
+                <a:ea typeface="Inter"/>
+                <a:cs typeface="Inter"/>
+                <a:sym typeface="Inter"/>
+              </a:rPr>
+              <a:t>9</a:t>
+            </a:r>
+            <a:r>
+              <a:rPr b="1" i="0" lang="en-US" sz="1300" u="none" cap="none" strike="noStrike">
+                <a:solidFill>
+                  <a:srgbClr val="1E3A5F"/>
+                </a:solidFill>
+                <a:latin typeface="Inter"/>
+                <a:ea typeface="Inter"/>
+                <a:cs typeface="Inter"/>
+                <a:sym typeface="Inter"/>
+              </a:rPr>
+              <a:t>.</a:t>
+            </a:r>
+            <a:r>
+              <a:rPr b="1" lang="en-US" sz="1300">
+                <a:solidFill>
+                  <a:srgbClr val="1E3A5F"/>
+                </a:solidFill>
+                <a:latin typeface="Inter"/>
+                <a:ea typeface="Inter"/>
+                <a:cs typeface="Inter"/>
+                <a:sym typeface="Inter"/>
+              </a:rPr>
+              <a:t>6</a:t>
+            </a:r>
+            <a:r>
+              <a:rPr b="1" i="0" lang="en-US" sz="1300" u="none" cap="none" strike="noStrike">
+                <a:solidFill>
+                  <a:srgbClr val="1E3A5F"/>
+                </a:solidFill>
+                <a:latin typeface="Inter"/>
+                <a:ea typeface="Inter"/>
+                <a:cs typeface="Inter"/>
+                <a:sym typeface="Inter"/>
+              </a:rPr>
+              <a:t>%</a:t>
+            </a:r>
+            <a:endParaRPr b="0" i="0" sz="1300" u="none" cap="none" strike="noStrike">
+              <a:solidFill>
+                <a:schemeClr val="dk1"/>
+              </a:solidFill>
+              <a:latin typeface="Calibri"/>
+              <a:ea typeface="Calibri"/>
+              <a:cs typeface="Calibri"/>
+              <a:sym typeface="Calibri"/>
+            </a:endParaRPr>
+          </a:p>
+        </p:txBody>
+      </p:sp>
+      <p:sp>
+        <p:nvSpPr>
+          <p:cNvPr id="323" name="Google Shape;323;p9"/>
+          <p:cNvSpPr/>
+          <p:nvPr/>
+        </p:nvSpPr>
+        <p:spPr>
+          <a:xfrm>
+            <a:off x="6489944" y="1856556"/>
+            <a:ext cx="769821" cy="195263"/>
+          </a:xfrm>
+          <a:prstGeom prst="rect">
+            <a:avLst/>
+          </a:prstGeom>
+          <a:noFill/>
+          <a:ln>
+            <a:noFill/>
+          </a:ln>
+        </p:spPr>
+        <p:txBody>
+          <a:bodyPr anchorCtr="0" anchor="ctr" bIns="0" lIns="0" spcFirstLastPara="1" rIns="0" wrap="square" tIns="0">
+            <a:noAutofit/>
+          </a:bodyPr>
+          <a:lstStyle/>
+          <a:p>
+            <a:pPr indent="0" lvl="0" marL="0" marR="0" rtl="0" algn="ctr">
+              <a:lnSpc>
+                <a:spcPct val="100000"/>
+              </a:lnSpc>
+              <a:spcBef>
+                <a:spcPts val="0"/>
+              </a:spcBef>
+              <a:spcAft>
+                <a:spcPts val="0"/>
+              </a:spcAft>
+              <a:buClr>
+                <a:srgbClr val="0D9488"/>
+              </a:buClr>
+              <a:buSzPts val="1300"/>
+              <a:buFont typeface="Inter"/>
+              <a:buNone/>
+            </a:pPr>
+            <a:r>
+              <a:rPr b="1" lang="en-US" sz="1300">
+                <a:solidFill>
+                  <a:srgbClr val="0D9488"/>
+                </a:solidFill>
+                <a:latin typeface="Inter"/>
+                <a:ea typeface="Inter"/>
+                <a:cs typeface="Inter"/>
+                <a:sym typeface="Inter"/>
+              </a:rPr>
+              <a:t>52</a:t>
+            </a:r>
+            <a:r>
+              <a:rPr b="1" i="0" lang="en-US" sz="1300" u="none" cap="none" strike="noStrike">
+                <a:solidFill>
+                  <a:srgbClr val="0D9488"/>
+                </a:solidFill>
+                <a:latin typeface="Inter"/>
+                <a:ea typeface="Inter"/>
+                <a:cs typeface="Inter"/>
+                <a:sym typeface="Inter"/>
+              </a:rPr>
+              <a:t>.</a:t>
+            </a:r>
+            <a:r>
+              <a:rPr b="1" lang="en-US" sz="1300">
+                <a:solidFill>
+                  <a:srgbClr val="0D9488"/>
+                </a:solidFill>
+                <a:latin typeface="Inter"/>
+                <a:ea typeface="Inter"/>
+                <a:cs typeface="Inter"/>
+                <a:sym typeface="Inter"/>
+              </a:rPr>
+              <a:t>3</a:t>
+            </a:r>
+            <a:r>
+              <a:rPr b="1" i="0" lang="en-US" sz="1300" u="none" cap="none" strike="noStrike">
+                <a:solidFill>
+                  <a:srgbClr val="0D9488"/>
+                </a:solidFill>
+                <a:latin typeface="Inter"/>
+                <a:ea typeface="Inter"/>
+                <a:cs typeface="Inter"/>
+                <a:sym typeface="Inter"/>
+              </a:rPr>
+              <a:t>%</a:t>
+            </a:r>
+            <a:endParaRPr b="0" i="0" sz="1300" u="none" cap="none" strike="noStrike">
+              <a:solidFill>
+                <a:schemeClr val="dk1"/>
+              </a:solidFill>
+              <a:latin typeface="Calibri"/>
+              <a:ea typeface="Calibri"/>
+              <a:cs typeface="Calibri"/>
+              <a:sym typeface="Calibri"/>
+            </a:endParaRPr>
+          </a:p>
+        </p:txBody>
+      </p:sp>
+      <p:sp>
+        <p:nvSpPr>
+          <p:cNvPr id="324" name="Google Shape;324;p9"/>
+          <p:cNvSpPr/>
+          <p:nvPr/>
+        </p:nvSpPr>
+        <p:spPr>
+          <a:xfrm>
+            <a:off x="7757056" y="1856556"/>
+            <a:ext cx="584180" cy="195263"/>
+          </a:xfrm>
+          <a:prstGeom prst="rect">
+            <a:avLst/>
+          </a:prstGeom>
+          <a:noFill/>
+          <a:ln>
+            <a:noFill/>
+          </a:ln>
+        </p:spPr>
+        <p:txBody>
+          <a:bodyPr anchorCtr="0" anchor="ctr" bIns="0" lIns="0" spcFirstLastPara="1" rIns="0" wrap="square" tIns="0">
+            <a:noAutofit/>
+          </a:bodyPr>
+          <a:lstStyle/>
+          <a:p>
+            <a:pPr indent="0" lvl="0" marL="0" marR="0" rtl="0" algn="ctr">
+              <a:lnSpc>
+                <a:spcPct val="100000"/>
+              </a:lnSpc>
+              <a:spcBef>
+                <a:spcPts val="0"/>
+              </a:spcBef>
+              <a:spcAft>
+                <a:spcPts val="0"/>
+              </a:spcAft>
+              <a:buClr>
+                <a:srgbClr val="1E3A5F"/>
+              </a:buClr>
+              <a:buSzPts val="1300"/>
+              <a:buFont typeface="Inter"/>
+              <a:buNone/>
+            </a:pPr>
+            <a:r>
+              <a:rPr b="1" i="0" lang="en-US" sz="1300" u="none" cap="none" strike="noStrike">
+                <a:solidFill>
+                  <a:srgbClr val="1E3A5F"/>
+                </a:solidFill>
+                <a:latin typeface="Inter"/>
+                <a:ea typeface="Inter"/>
+                <a:cs typeface="Inter"/>
+                <a:sym typeface="Inter"/>
+              </a:rPr>
+              <a:t>81</a:t>
+            </a:r>
+            <a:r>
+              <a:rPr b="1" lang="en-US" sz="1300">
+                <a:solidFill>
+                  <a:srgbClr val="1E3A5F"/>
+                </a:solidFill>
+                <a:latin typeface="Inter"/>
+                <a:ea typeface="Inter"/>
+                <a:cs typeface="Inter"/>
+                <a:sym typeface="Inter"/>
+              </a:rPr>
+              <a:t>.7%</a:t>
             </a:r>
             <a:endParaRPr b="0" i="0" sz="1300" u="none" cap="none" strike="noStrike">
               <a:solidFill>
@@ -22562,7 +22774,7 @@
                 <a:cs typeface="Inter"/>
                 <a:sym typeface="Inter"/>
               </a:rPr>
-              <a:t>0.782</a:t>
+              <a:t>78.2%</a:t>
             </a:r>
             <a:endParaRPr b="0" i="0" sz="1300" u="none" cap="none" strike="noStrike">
               <a:solidFill>
@@ -23056,13 +23268,13 @@
           <a:blip r:embed="rId4">
             <a:alphaModFix/>
           </a:blip>
-          <a:srcRect b="0" l="0" r="0" t="0"/>
+          <a:srcRect b="0" l="990" r="-990" t="0"/>
           <a:stretch/>
         </p:blipFill>
         <p:spPr>
           <a:xfrm>
-            <a:off x="371475" y="1728713"/>
-            <a:ext cx="8401050" cy="490537"/>
+            <a:off x="547650" y="1189750"/>
+            <a:ext cx="8229651" cy="490525"/>
           </a:xfrm>
           <a:prstGeom prst="rect">
             <a:avLst/>
@@ -23145,7 +23357,7 @@
         <p:spPr>
           <a:xfrm>
             <a:off x="3569600" y="2765975"/>
-            <a:ext cx="5076576" cy="1906325"/>
+            <a:ext cx="5202925" cy="1906325"/>
           </a:xfrm>
           <a:prstGeom prst="rect">
             <a:avLst/>
